--- a/6. Coordinating Multiple Tasks/CoordinatingTasks.pptx
+++ b/6. Coordinating Multiple Tasks/CoordinatingTasks.pptx
@@ -7,10 +7,10 @@
     <p:sldMasterId id="2147484523" r:id="rId6"/>
   </p:sldMasterIdLst>
   <p:notesMasterIdLst>
-    <p:notesMasterId r:id="rId23"/>
+    <p:notesMasterId r:id="rId22"/>
   </p:notesMasterIdLst>
   <p:handoutMasterIdLst>
-    <p:handoutMasterId r:id="rId24"/>
+    <p:handoutMasterId r:id="rId23"/>
   </p:handoutMasterIdLst>
   <p:sldIdLst>
     <p:sldId id="256" r:id="rId7"/>
@@ -27,8 +27,7 @@
     <p:sldId id="268" r:id="rId18"/>
     <p:sldId id="269" r:id="rId19"/>
     <p:sldId id="270" r:id="rId20"/>
-    <p:sldId id="271" r:id="rId21"/>
-    <p:sldId id="272" r:id="rId22"/>
+    <p:sldId id="272" r:id="rId21"/>
   </p:sldIdLst>
   <p:sldSz cx="12436475" cy="6994525"/>
   <p:notesSz cx="6858000" cy="9144000"/>
@@ -1200,76 +1199,6 @@
 </file>
 
 <file path=ppt/notesSlides/notesSlide15.xml><?xml version="1.0" encoding="utf-8"?>
-<p:notes xmlns:a="http://schemas.openxmlformats.org/drawingml/2006/main" xmlns:r="http://schemas.openxmlformats.org/officeDocument/2006/relationships" xmlns:p="http://schemas.openxmlformats.org/presentationml/2006/main">
-  <p:cSld>
-    <p:spTree>
-      <p:nvGrpSpPr>
-        <p:cNvPr id="1" name=""/>
-        <p:cNvGrpSpPr/>
-        <p:nvPr/>
-      </p:nvGrpSpPr>
-      <p:grpSpPr>
-        <a:xfrm>
-          <a:off x="0" y="0"/>
-          <a:ext cx="0" cy="0"/>
-          <a:chOff x="0" y="0"/>
-          <a:chExt cx="0" cy="0"/>
-        </a:xfrm>
-      </p:grpSpPr>
-      <p:sp>
-        <p:nvSpPr>
-          <p:cNvPr id="2" name="Slide Image Placeholder 1"/>
-          <p:cNvSpPr>
-            <a:spLocks noGrp="1" noRot="1" noChangeAspect="1"/>
-          </p:cNvSpPr>
-          <p:nvPr>
-            <p:ph type="sldImg" idx="2"/>
-          </p:nvPr>
-        </p:nvSpPr>
-        <p:spPr/>
-      </p:sp>
-      <p:sp>
-        <p:nvSpPr>
-          <p:cNvPr id="3" name="Notes Placeholder 2"/>
-          <p:cNvSpPr>
-            <a:spLocks noGrp="1"/>
-          </p:cNvSpPr>
-          <p:nvPr>
-            <p:ph type="body" sz="quarter" idx="3"/>
-          </p:nvPr>
-        </p:nvSpPr>
-        <p:spPr/>
-        <p:txBody>
-          <a:bodyPr/>
-          <a:lstStyle/>
-          <a:p>
-            <a:r>
-              <a:t>Coordination fixes the clock. It does not fix the blast radius. In the starter app all five calls sit inside one try block, so the first failure ends the load and four healthy panels become collateral damage. The fix is not a bigger catch, it is a smaller one. Give each call a small wrapper method whose only job is to run that one call, record the result on success, and record the message on failure. Because the wrapper handles its own failure, the Task it returns always completes successfully, so your WhenAll or WhenEach never sees a fault at all. That is what keeps the coordination code so short. Catch the exception you actually expect, HttpRequestException here, rather than a bare Exception that would also hide your own bugs. One flaky dependency should cost you one panel. https://learn.microsoft.com/dotnet/standard/parallel-programming/exception-handling-task-parallel-library</a:t>
-            </a:r>
-          </a:p>
-        </p:txBody>
-      </p:sp>
-      <p:sp>
-        <p:nvSpPr>
-          <p:cNvPr id="4" name="Slide Number Placeholder 3"/>
-          <p:cNvSpPr>
-            <a:spLocks noGrp="1"/>
-          </p:cNvSpPr>
-          <p:nvPr>
-            <p:ph type="sldNum" sz="quarter" idx="5"/>
-          </p:nvPr>
-        </p:nvSpPr>
-        <p:spPr/>
-      </p:sp>
-    </p:spTree>
-  </p:cSld>
-  <p:clrMapOvr>
-    <a:masterClrMapping/>
-  </p:clrMapOvr>
-</p:notes>
-</file>
-
-<file path=ppt/notesSlides/notesSlide16.xml><?xml version="1.0" encoding="utf-8"?>
 <p:notes xmlns:a="http://schemas.openxmlformats.org/drawingml/2006/main" xmlns:r="http://schemas.openxmlformats.org/officeDocument/2006/relationships" xmlns:p="http://schemas.openxmlformats.org/presentationml/2006/main">
   <p:cSld>
     <p:spTree>
@@ -8018,7 +7947,7 @@
                   <a:lin ang="5400000" scaled="0"/>
                 </a:gradFill>
               </a:rPr>
-              <a:t>Remove the winner</a:t>
+              <a:t>Remove The Completed Task</a:t>
             </a:r>
             <a:endParaRPr lang="en-US" sz="4000" dirty="0">
               <a:gradFill>
@@ -8049,7 +7978,7 @@
         <p:spPr>
           <a:xfrm>
             <a:off x="274320" y="1627632"/>
-            <a:ext cx="5303520" cy="4636008"/>
+            <a:ext cx="5303520" cy="960263"/>
           </a:xfrm>
         </p:spPr>
         <p:txBody>
@@ -8058,13 +7987,7 @@
           <a:p>
             <a:r>
               <a:rPr lang="en-US" sz="2800" dirty="0"/>
-              <a:t>Forget the `Remove` and you loop forever</a:t>
-            </a:r>
-          </a:p>
-          <a:p>
-            <a:r>
-              <a:rPr lang="en-US" sz="2800" dirty="0"/>
-              <a:t>Quadratic: every pass re-registers on every Task</a:t>
+              <a:t>Forget to call `Remove` and you loop forever</a:t>
             </a:r>
           </a:p>
         </p:txBody>
@@ -8256,7 +8179,7 @@
         <p:spPr>
           <a:xfrm>
             <a:off x="274320" y="1627632"/>
-            <a:ext cx="11887200" cy="4636008"/>
+            <a:ext cx="11887200" cy="1292662"/>
           </a:xfrm>
         </p:spPr>
         <p:txBody>
@@ -8265,43 +8188,13 @@
           <a:p>
             <a:r>
               <a:rPr lang="en-US" dirty="0"/>
-              <a:t>Stream results from multiple Tasks running in parallel</a:t>
+              <a:t>`await foreach`</a:t>
             </a:r>
           </a:p>
           <a:p>
             <a:r>
               <a:rPr lang="en-US" dirty="0"/>
-              <a:t>`await foreach`</a:t>
-            </a:r>
-          </a:p>
-          <a:p>
-            <a:r>
-              <a:rPr lang="en-US" dirty="0"/>
-              <a:t>Loop body runs upon each Task Completed</a:t>
-            </a:r>
-          </a:p>
-          <a:p>
-            <a:r>
-              <a:rPr lang="en-US" dirty="0"/>
-              <a:t>Introduced in .NET 9</a:t>
-            </a:r>
-          </a:p>
-          <a:p>
-            <a:r>
-              <a:rPr lang="en-US" dirty="0"/>
-              <a:t>No list to maintain, no `Remove` to forget</a:t>
-            </a:r>
-          </a:p>
-          <a:p>
-            <a:r>
-              <a:rPr lang="en-US" dirty="0"/>
-              <a:t>Yields the Task, so `await` it for the value</a:t>
-            </a:r>
-          </a:p>
-          <a:p>
-            <a:r>
-              <a:rPr lang="en-US" dirty="0"/>
-              <a:t>Faulted Tasks yielded too, `await` throws</a:t>
+              <a:t>Streams results from multiple Tasks running in parallel</a:t>
             </a:r>
           </a:p>
         </p:txBody>
@@ -8558,7 +8451,7 @@
         <p:spPr>
           <a:xfrm>
             <a:off x="274320" y="1627632"/>
-            <a:ext cx="11887200" cy="4636008"/>
+            <a:ext cx="11887200" cy="3065455"/>
           </a:xfrm>
         </p:spPr>
         <p:txBody>
@@ -8566,44 +8459,65 @@
           <a:lstStyle/>
           <a:p>
             <a:r>
-              <a:rPr lang="en-US" dirty="0"/>
-              <a:t>`Task.WhenAll`: you need everything before you continue</a:t>
-            </a:r>
-          </a:p>
-          <a:p>
-            <a:r>
-              <a:rPr lang="en-US" dirty="0"/>
-              <a:t>`Task.WhenAny`: one winner is enough, eg a timeout race</a:t>
-            </a:r>
-          </a:p>
-          <a:p>
-            <a:r>
-              <a:rPr lang="en-US" dirty="0"/>
-              <a:t>`Task.WhenEach`: show each result the moment it lands</a:t>
-            </a:r>
-          </a:p>
-          <a:p>
-            <a:r>
-              <a:rPr lang="en-US" dirty="0"/>
-              <a:t>`Task.WhenAll` and `Task.WhenEach`: same wall clock cost</a:t>
-            </a:r>
-          </a:p>
-          <a:p>
-            <a:r>
-              <a:rPr lang="en-US" dirty="0"/>
-              <a:t>`Task.WhenAny` is faster: it returns at the first finish</a:t>
-            </a:r>
-          </a:p>
-          <a:p>
-            <a:r>
-              <a:rPr lang="en-US" dirty="0"/>
-              <a:t>All three need the Tasks started first</a:t>
-            </a:r>
-          </a:p>
-          <a:p>
-            <a:r>
-              <a:rPr lang="en-US" dirty="0"/>
-              <a:t>Only `Task.WhenAll` bundles the failures for you</a:t>
+              <a:rPr lang="en-US" sz="3200" dirty="0"/>
+              <a:t>`</a:t>
+            </a:r>
+            <a:r>
+              <a:rPr lang="en-US" sz="3200" dirty="0" err="1"/>
+              <a:t>Task.WhenAll</a:t>
+            </a:r>
+            <a:r>
+              <a:rPr lang="en-US" sz="3200" dirty="0"/>
+              <a:t>`</a:t>
+            </a:r>
+          </a:p>
+          <a:p>
+            <a:pPr lvl="1"/>
+            <a:r>
+              <a:rPr lang="en-US" sz="2400" dirty="0"/>
+              <a:t>You need everything before you continue</a:t>
+            </a:r>
+          </a:p>
+          <a:p>
+            <a:r>
+              <a:rPr lang="en-US" sz="3200" dirty="0"/>
+              <a:t>`</a:t>
+            </a:r>
+            <a:r>
+              <a:rPr lang="en-US" sz="3200" dirty="0" err="1"/>
+              <a:t>Task.WhenAny</a:t>
+            </a:r>
+            <a:r>
+              <a:rPr lang="en-US" sz="3200" dirty="0"/>
+              <a:t>`</a:t>
+            </a:r>
+          </a:p>
+          <a:p>
+            <a:pPr lvl="1"/>
+            <a:r>
+              <a:rPr lang="en-US" sz="2400" dirty="0"/>
+              <a:t>One winner is enough</a:t>
+            </a:r>
+          </a:p>
+          <a:p>
+            <a:r>
+              <a:rPr lang="en-US" sz="4000" dirty="0"/>
+              <a:t>`</a:t>
+            </a:r>
+            <a:r>
+              <a:rPr lang="en-US" sz="4000" dirty="0" err="1"/>
+              <a:t>Task.WhenEach</a:t>
+            </a:r>
+            <a:r>
+              <a:rPr lang="en-US" sz="4000" dirty="0"/>
+              <a:t>`</a:t>
+            </a:r>
+          </a:p>
+          <a:p>
+            <a:pPr lvl="1"/>
+            <a:r>
+              <a:rPr lang="en-US" sz="2400" dirty="0"/>
+              <a:t>Show each result the moment it lands</a:t>
             </a:r>
           </a:p>
         </p:txBody>
@@ -8662,154 +8576,6 @@
           <a:p>
             <a:r>
               <a:rPr lang="en-US" dirty="0"/>
-              <a:t>One Failure, One Panel</a:t>
-            </a:r>
-            <a:br>
-              <a:rPr lang="en-US" dirty="0"/>
-            </a:br>
-            <a:r>
-              <a:rPr lang="en-US" sz="3600" dirty="0">
-                <a:gradFill>
-                  <a:gsLst>
-                    <a:gs pos="1250">
-                      <a:srgbClr val="FFB900"/>
-                    </a:gs>
-                    <a:gs pos="100000">
-                      <a:srgbClr val="FFB900"/>
-                    </a:gs>
-                  </a:gsLst>
-                  <a:lin ang="5400000" scaled="0"/>
-                </a:gradFill>
-              </a:rPr>
-              <a:t>Wrap the call, not the page</a:t>
-            </a:r>
-            <a:endParaRPr lang="en-US" sz="4000" dirty="0">
-              <a:gradFill>
-                <a:gsLst>
-                  <a:gs pos="1250">
-                    <a:srgbClr val="FFB900"/>
-                  </a:gs>
-                  <a:gs pos="100000">
-                    <a:srgbClr val="FFB900"/>
-                  </a:gs>
-                </a:gsLst>
-                <a:lin ang="5400000" scaled="0"/>
-              </a:gradFill>
-            </a:endParaRPr>
-          </a:p>
-        </p:txBody>
-      </p:sp>
-      <p:sp>
-        <p:nvSpPr>
-          <p:cNvPr id="3" name="Text Placeholder 2"/>
-          <p:cNvSpPr>
-            <a:spLocks noGrp="1"/>
-          </p:cNvSpPr>
-          <p:nvPr>
-            <p:ph type="body" sz="quarter" idx="10"/>
-          </p:nvPr>
-        </p:nvSpPr>
-        <p:spPr>
-          <a:xfrm>
-            <a:off x="274320" y="1627632"/>
-            <a:ext cx="11887200" cy="4636008"/>
-          </a:xfrm>
-        </p:spPr>
-        <p:txBody>
-          <a:bodyPr/>
-          <a:lstStyle/>
-          <a:p>
-            <a:r>
-              <a:rPr lang="en-US" dirty="0"/>
-              <a:t>Shared `try`, shared failure</a:t>
-            </a:r>
-          </a:p>
-          <a:p>
-            <a:r>
-              <a:rPr lang="en-US" dirty="0"/>
-              <a:t>Wrap each call in its own method with its own `catch`</a:t>
-            </a:r>
-          </a:p>
-          <a:p>
-            <a:r>
-              <a:rPr lang="en-US" dirty="0"/>
-              <a:t>Wrapper records a result or an error, never throws</a:t>
-            </a:r>
-          </a:p>
-          <a:p>
-            <a:r>
-              <a:rPr lang="en-US" dirty="0"/>
-              <a:t>Coordinating loop never sees a fault</a:t>
-            </a:r>
-          </a:p>
-          <a:p>
-            <a:r>
-              <a:rPr lang="en-US" dirty="0"/>
-              <a:t>One flaky service, one degraded panel</a:t>
-            </a:r>
-          </a:p>
-          <a:p>
-            <a:r>
-              <a:rPr lang="en-US" dirty="0"/>
-              <a:t>Catch what you expect, eg `HttpRequestException`</a:t>
-            </a:r>
-          </a:p>
-        </p:txBody>
-      </p:sp>
-    </p:spTree>
-  </p:cSld>
-  <p:clrMapOvr>
-    <a:masterClrMapping/>
-  </p:clrMapOvr>
-  <mc:AlternateContent xmlns:mc="http://schemas.openxmlformats.org/markup-compatibility/2006" xmlns:p14="http://schemas.microsoft.com/office/powerpoint/2010/main">
-    <mc:Choice Requires="p14">
-      <p:transition spd="med" p14:dur="700">
-        <p:fade/>
-      </p:transition>
-    </mc:Choice>
-    <mc:Fallback xmlns="">
-      <p:transition spd="med">
-        <p:fade/>
-      </p:transition>
-    </mc:Fallback>
-  </mc:AlternateContent>
-</p:sld>
-</file>
-
-<file path=ppt/slides/slide16.xml><?xml version="1.0" encoding="utf-8"?>
-<p:sld xmlns:a="http://schemas.openxmlformats.org/drawingml/2006/main" xmlns:r="http://schemas.openxmlformats.org/officeDocument/2006/relationships" xmlns:p="http://schemas.openxmlformats.org/presentationml/2006/main">
-  <p:cSld>
-    <p:spTree>
-      <p:nvGrpSpPr>
-        <p:cNvPr id="1" name=""/>
-        <p:cNvGrpSpPr/>
-        <p:nvPr/>
-      </p:nvGrpSpPr>
-      <p:grpSpPr>
-        <a:xfrm>
-          <a:off x="0" y="0"/>
-          <a:ext cx="0" cy="0"/>
-          <a:chOff x="0" y="0"/>
-          <a:chExt cx="0" cy="0"/>
-        </a:xfrm>
-      </p:grpSpPr>
-      <p:sp>
-        <p:nvSpPr>
-          <p:cNvPr id="2" name="Title 1"/>
-          <p:cNvSpPr>
-            <a:spLocks noGrp="1"/>
-          </p:cNvSpPr>
-          <p:nvPr>
-            <p:ph type="title"/>
-          </p:nvPr>
-        </p:nvSpPr>
-        <p:spPr/>
-        <p:txBody>
-          <a:bodyPr/>
-          <a:lstStyle/>
-          <a:p>
-            <a:r>
-              <a:rPr lang="en-US" dirty="0"/>
               <a:t>Challenge: Coordinate the Product Page</a:t>
             </a:r>
             <a:br>
@@ -8860,52 +8626,96 @@
         <p:spPr>
           <a:xfrm>
             <a:off x="274320" y="1627632"/>
-            <a:ext cx="11887200" cy="4636008"/>
+            <a:ext cx="11887200" cy="4339650"/>
           </a:xfrm>
         </p:spPr>
         <p:txBody>
           <a:bodyPr/>
           <a:lstStyle/>
           <a:p>
+            <a:pPr marL="742950" indent="-742950">
+              <a:buFont typeface="+mj-lt"/>
+              <a:buAutoNum type="arabicPeriod"/>
+            </a:pPr>
             <a:r>
               <a:rPr lang="en-US" dirty="0"/>
-              <a:t>Open `6. Coordinating Multiple Tasks/1. Start`</a:t>
-            </a:r>
-          </a:p>
-          <a:p>
+              <a:t>Open `</a:t>
+            </a:r>
+            <a:r>
+              <a:rPr lang="en-US" b="1" dirty="0"/>
+              <a:t>6. Coordinating Multiple Tasks/1. Start</a:t>
+            </a:r>
+            <a:r>
+              <a:rPr lang="en-US" dirty="0"/>
+              <a:t>`</a:t>
+            </a:r>
+          </a:p>
+          <a:p>
+            <a:pPr marL="742950" indent="-742950">
+              <a:buFont typeface="+mj-lt"/>
+              <a:buAutoNum type="arabicPeriod"/>
+            </a:pPr>
             <a:r>
               <a:rPr lang="en-US" dirty="0"/>
               <a:t>Run it, click Load product page, read the timings</a:t>
             </a:r>
           </a:p>
           <a:p>
+            <a:pPr marL="742950" indent="-742950">
+              <a:buFont typeface="+mj-lt"/>
+              <a:buAutoNum type="arabicPeriod"/>
+            </a:pPr>
             <a:r>
               <a:rPr lang="en-US" dirty="0"/>
               <a:t>Start all five calls before awaiting any of them</a:t>
             </a:r>
           </a:p>
           <a:p>
+            <a:pPr marL="742950" indent="-742950">
+              <a:buFont typeface="+mj-lt"/>
+              <a:buAutoNum type="arabicPeriod"/>
+            </a:pPr>
             <a:r>
               <a:rPr lang="en-US" dirty="0"/>
               <a:t>Paint each panel as its own service answers</a:t>
             </a:r>
           </a:p>
           <a:p>
+            <a:pPr marL="742950" indent="-742950">
+              <a:buFont typeface="+mj-lt"/>
+              <a:buAutoNum type="arabicPeriod"/>
+            </a:pPr>
             <a:r>
               <a:rPr lang="en-US" dirty="0"/>
               <a:t>Keep the broken service inside its own panel</a:t>
             </a:r>
           </a:p>
           <a:p>
+            <a:pPr marL="742950" indent="-742950">
+              <a:buFont typeface="+mj-lt"/>
+              <a:buAutoNum type="arabicPeriod"/>
+            </a:pPr>
             <a:r>
               <a:rPr lang="en-US" dirty="0"/>
               <a:t>Target: 1.2 seconds, five cards, one of them red</a:t>
             </a:r>
           </a:p>
           <a:p>
+            <a:pPr marL="742950" indent="-742950">
+              <a:buFont typeface="+mj-lt"/>
+              <a:buAutoNum type="arabicPeriod"/>
+            </a:pPr>
             <a:r>
               <a:rPr lang="en-US" dirty="0"/>
-              <a:t>Then compare with `2. Finish`</a:t>
+              <a:t>Compare with `</a:t>
+            </a:r>
+            <a:r>
+              <a:rPr lang="en-US" b="1" dirty="0"/>
+              <a:t>2. Finish</a:t>
+            </a:r>
+            <a:r>
+              <a:rPr lang="en-US" dirty="0"/>
+              <a:t>`</a:t>
             </a:r>
           </a:p>
         </p:txBody>
@@ -9618,7 +9428,7 @@
         <p:spPr>
           <a:xfrm>
             <a:off x="274320" y="1627632"/>
-            <a:ext cx="11887200" cy="4339650"/>
+            <a:ext cx="11887200" cy="1766637"/>
           </a:xfrm>
         </p:spPr>
         <p:txBody>
@@ -9641,39 +9451,14 @@
           <a:p>
             <a:pPr lvl="1"/>
             <a:r>
-              <a:rPr lang="en-US"/>
-              <a:t>even if one has Faulted</a:t>
-            </a:r>
-            <a:endParaRPr lang="en-US" dirty="0"/>
+              <a:rPr lang="en-US" dirty="0"/>
+              <a:t>Even if one has Faulted</a:t>
+            </a:r>
           </a:p>
           <a:p>
             <a:r>
               <a:rPr lang="en-US" dirty="0"/>
               <a:t>`await` rethrows only the first exception</a:t>
-            </a:r>
-          </a:p>
-          <a:p>
-            <a:r>
-              <a:rPr lang="en-US" dirty="0"/>
-              <a:t>The Task it returns still holds all of them</a:t>
-            </a:r>
-          </a:p>
-          <a:p>
-            <a:r>
-              <a:rPr lang="en-US" dirty="0"/>
-              <a:t>`Task.Exception.InnerExceptions` is the full list</a:t>
-            </a:r>
-          </a:p>
-          <a:p>
-            <a:r>
-              <a:rPr lang="en-US" dirty="0"/>
-              <a:t>Keep the Task in a variable before you `await`</a:t>
-            </a:r>
-          </a:p>
-          <a:p>
-            <a:r>
-              <a:rPr lang="en-US" dirty="0"/>
-              <a:t>One `try` around `WhenAll` is still one shared failure</a:t>
             </a:r>
           </a:p>
         </p:txBody>
@@ -9841,7 +9626,7 @@
         <p:spPr>
           <a:xfrm>
             <a:off x="274320" y="1627632"/>
-            <a:ext cx="11887200" cy="4636008"/>
+            <a:ext cx="11887200" cy="2376035"/>
           </a:xfrm>
         </p:spPr>
         <p:txBody>
@@ -9856,37 +9641,28 @@
           <a:p>
             <a:r>
               <a:rPr lang="en-US" dirty="0"/>
-              <a:t>Runs until one Task has Completed</a:t>
+              <a:t>Runs until </a:t>
+            </a:r>
+            <a:r>
+              <a:rPr lang="en-US" b="1" dirty="0"/>
+              <a:t>one</a:t>
+            </a:r>
+            <a:r>
+              <a:rPr lang="en-US" dirty="0"/>
+              <a:t> Task has Completed</a:t>
+            </a:r>
+          </a:p>
+          <a:p>
+            <a:pPr lvl="1"/>
+            <a:r>
+              <a:rPr lang="en-US" dirty="0"/>
+              <a:t>Returns the first Task to complete</a:t>
             </a:r>
           </a:p>
           <a:p>
             <a:r>
               <a:rPr lang="en-US" dirty="0"/>
               <a:t>Can be used with `List&lt;Task&gt;`</a:t>
-            </a:r>
-          </a:p>
-          <a:p>
-            <a:r>
-              <a:rPr lang="en-US" dirty="0"/>
-              <a:t>Returns the Task that won, not its result</a:t>
-            </a:r>
-          </a:p>
-          <a:p>
-            <a:r>
-              <a:rPr lang="en-US" dirty="0"/>
-              <a:t>`await` the returned Task to get the value</a:t>
-            </a:r>
-          </a:p>
-          <a:p>
-            <a:r>
-              <a:rPr lang="en-US" dirty="0"/>
-              <a:t>Completes successfully even when the winner faulted</a:t>
-            </a:r>
-          </a:p>
-          <a:p>
-            <a:r>
-              <a:rPr lang="en-US" dirty="0"/>
-              <a:t>Timeouts, fastest responder, progress loops</a:t>
             </a:r>
           </a:p>
         </p:txBody>

--- a/6. Coordinating Multiple Tasks/CoordinatingTasks.pptx
+++ b/6. Coordinating Multiple Tasks/CoordinatingTasks.pptx
@@ -1243,7 +1243,7 @@
           <a:lstStyle/>
           <a:p>
             <a:r>
-              <a:t>Twenty minutes. Open the Start project, run it, and click the button before you change anything, because the timings on the cards are the evidence. You should see 0.7, 1.6, 2.8 and 3.4 seconds, one card still stuck on waiting, and 4.2 seconds on the tile. Then go fix it. Start all five calls before you await any of them, give each call somewhere to fail that is not the whole page, and repaint as each service answers. Any of the three primitives will get the clock down to 1.2 seconds. Which one you pick decides whether the cards appear together or one at a time. When you are done you should have five cards, four of them green with timings between 0.6 and 1.2 seconds, one red carrying the 503 message, and no banner across the top. Then we will review approaches together before the walkthrough.</a:t>
+              <a:t>Twenty minutes. Open the Start project, run it, and click the button before you change anything, because the timings on the cards are the evidence. You should see 0.7, 1.6, 2.8 and 3.4 seconds, one card reading never requested, and 4.2 seconds on the tile. Then go fix it. Start all five calls before you await any of them, give each call somewhere to fail that is not the whole page, and repaint as each service answers. Any of the three primitives will get the clock down to 1.2 seconds. Which one you pick decides whether the cards appear together or one at a time. When you are done you should have five cards, four of them green with timings between 0.6 and 1.2 seconds, one red carrying a short failure message, with the 503 itself in your terminal, and no banner across the top. Then we will review approaches together before the walkthrough.</a:t>
             </a:r>
           </a:p>
         </p:txBody>

--- a/6. Coordinating Multiple Tasks/CoordinatingTasks.pptx
+++ b/6. Coordinating Multiple Tasks/CoordinatingTasks.pptx
@@ -255,7 +255,7 @@
               <a:rPr lang="en-US" smtClean="0">
                 <a:latin typeface="Segoe UI" pitchFamily="34" charset="0"/>
               </a:rPr>
-              <a:t>9/7/26 12:07 PM</a:t>
+              <a:t>9/12/26 4:47 PM</a:t>
             </a:fld>
             <a:endParaRPr lang="en-US">
               <a:latin typeface="Segoe UI" pitchFamily="34" charset="0"/>
@@ -533,7 +533,7 @@
           <a:p>
             <a:fld id="{D18B56EA-E28F-4F92-9F16-7A6F2501B303}" type="datetime8">
               <a:rPr lang="en-US" smtClean="0"/>
-              <a:t>9/7/26 12:07 PM</a:t>
+              <a:t>9/12/26 4:47 PM</a:t>
             </a:fld>
             <a:endParaRPr lang="en-US"/>
           </a:p>
@@ -7827,7 +7827,12 @@
             <p:ph type="title"/>
           </p:nvPr>
         </p:nvSpPr>
-        <p:spPr/>
+        <p:spPr>
+          <a:xfrm>
+            <a:off x="274701" y="2742366"/>
+            <a:ext cx="9143936" cy="1828786"/>
+          </a:xfrm>
+        </p:spPr>
         <p:txBody>
           <a:bodyPr/>
           <a:lstStyle/>
@@ -7835,13 +7840,6 @@
             <a:r>
               <a:rPr lang="en-US" sz="4000" dirty="0"/>
               <a:t>Coordinating Multiple Tasks</a:t>
-            </a:r>
-            <a:br>
-              <a:rPr lang="en-US" sz="4000" dirty="0"/>
-            </a:br>
-            <a:r>
-              <a:rPr lang="en-US" sz="4000" dirty="0"/>
-              <a:t>Task.WhenAll, Task.WhenAny, Task.WhenEach</a:t>
             </a:r>
           </a:p>
         </p:txBody>
@@ -8063,13 +8061,18 @@
             <p:ph type="title"/>
           </p:nvPr>
         </p:nvSpPr>
-        <p:spPr/>
+        <p:spPr>
+          <a:xfrm>
+            <a:off x="274638" y="2125662"/>
+            <a:ext cx="5638799" cy="1098762"/>
+          </a:xfrm>
+        </p:spPr>
         <p:txBody>
           <a:bodyPr/>
           <a:lstStyle/>
           <a:p>
             <a:r>
-              <a:rPr lang="en-US" dirty="0"/>
+              <a:rPr lang="en-US" sz="6600" dirty="0"/>
               <a:t>Task.WhenEach</a:t>
             </a:r>
           </a:p>
@@ -8451,7 +8454,7 @@
         <p:spPr>
           <a:xfrm>
             <a:off x="274320" y="1627632"/>
-            <a:ext cx="11887200" cy="3065455"/>
+            <a:ext cx="11887200" cy="2930033"/>
           </a:xfrm>
         </p:spPr>
         <p:txBody>
@@ -8501,15 +8504,15 @@
           </a:p>
           <a:p>
             <a:r>
-              <a:rPr lang="en-US" sz="4000" dirty="0"/>
+              <a:rPr lang="en-US" sz="3200" dirty="0"/>
               <a:t>`</a:t>
             </a:r>
             <a:r>
-              <a:rPr lang="en-US" sz="4000" dirty="0" err="1"/>
+              <a:rPr lang="en-US" sz="3200" dirty="0" err="1"/>
               <a:t>Task.WhenEach</a:t>
             </a:r>
             <a:r>
-              <a:rPr lang="en-US" sz="4000" dirty="0"/>
+              <a:rPr lang="en-US" sz="3200" dirty="0"/>
               <a:t>`</a:t>
             </a:r>
           </a:p>
@@ -11160,6 +11163,16 @@
 </file>
 
 <file path=customXml/item1.xml><?xml version="1.0" encoding="utf-8"?>
+<p:properties xmlns:p="http://schemas.microsoft.com/office/2006/metadata/properties" xmlns:xsi="http://www.w3.org/2001/XMLSchema-instance" xmlns:pc="http://schemas.microsoft.com/office/infopath/2007/PartnerControls">
+  <documentManagement>
+    <_ip_UnifiedCompliancePolicyUIAction xmlns="http://schemas.microsoft.com/sharepoint/v3" xsi:nil="true"/>
+    <MediaServiceKeyPoints xmlns="16dc66bd-df5a-4495-a5c9-5e296f49988a" xsi:nil="true"/>
+    <_ip_UnifiedCompliancePolicyProperties xmlns="http://schemas.microsoft.com/sharepoint/v3" xsi:nil="true"/>
+  </documentManagement>
+</p:properties>
+</file>
+
+<file path=customXml/item2.xml><?xml version="1.0" encoding="utf-8"?>
 <ct:contentTypeSchema xmlns:ct="http://schemas.microsoft.com/office/2006/metadata/contentType" xmlns:ma="http://schemas.microsoft.com/office/2006/metadata/properties/metaAttributes" ct:_="" ma:_="" ma:contentTypeName="Document" ma:contentTypeID="0x010100A33D2391BFF58241AEB203BD95DC1F89" ma:contentTypeVersion="16" ma:contentTypeDescription="Create a new document." ma:contentTypeScope="" ma:versionID="bd4b5e6fa70efd11586bd069caa6259f">
   <xsd:schema xmlns:xsd="http://www.w3.org/2001/XMLSchema" xmlns:xs="http://www.w3.org/2001/XMLSchema" xmlns:p="http://schemas.microsoft.com/office/2006/metadata/properties" xmlns:ns1="http://schemas.microsoft.com/sharepoint/v3" xmlns:ns2="16dc66bd-df5a-4495-a5c9-5e296f49988a" xmlns:ns3="12239fb0-26c0-4a37-b790-6c81fba9d0fc" targetNamespace="http://schemas.microsoft.com/office/2006/metadata/properties" ma:root="true" ma:fieldsID="1236f19879e555dfdef409a5be7c6d72" ns1:_="" ns2:_="" ns3:_="">
     <xsd:import namespace="http://schemas.microsoft.com/sharepoint/v3"/>
@@ -11405,16 +11418,6 @@
 </ct:contentTypeSchema>
 </file>
 
-<file path=customXml/item2.xml><?xml version="1.0" encoding="utf-8"?>
-<p:properties xmlns:p="http://schemas.microsoft.com/office/2006/metadata/properties" xmlns:xsi="http://www.w3.org/2001/XMLSchema-instance" xmlns:pc="http://schemas.microsoft.com/office/infopath/2007/PartnerControls">
-  <documentManagement>
-    <_ip_UnifiedCompliancePolicyUIAction xmlns="http://schemas.microsoft.com/sharepoint/v3" xsi:nil="true"/>
-    <MediaServiceKeyPoints xmlns="16dc66bd-df5a-4495-a5c9-5e296f49988a" xsi:nil="true"/>
-    <_ip_UnifiedCompliancePolicyProperties xmlns="http://schemas.microsoft.com/sharepoint/v3" xsi:nil="true"/>
-  </documentManagement>
-</p:properties>
-</file>
-
 <file path=customXml/item3.xml><?xml version="1.0" encoding="utf-8"?>
 <?mso-contentType ?>
 <FormTemplates xmlns="http://schemas.microsoft.com/sharepoint/v3/contenttype/forms">
@@ -11425,6 +11428,24 @@
 </file>
 
 <file path=customXml/itemProps1.xml><?xml version="1.0" encoding="utf-8"?>
+<ds:datastoreItem xmlns:ds="http://schemas.openxmlformats.org/officeDocument/2006/customXml" ds:itemID="{B59C5458-A72E-4627-9FFC-D350DCB4700F}">
+  <ds:schemaRefs>
+    <ds:schemaRef ds:uri="http://schemas.microsoft.com/office/2006/metadata/properties"/>
+    <ds:schemaRef ds:uri="http://schemas.openxmlformats.org/package/2006/metadata/core-properties"/>
+    <ds:schemaRef ds:uri="http://purl.org/dc/dcmitype/"/>
+    <ds:schemaRef ds:uri="http://schemas.microsoft.com/office/infopath/2007/PartnerControls"/>
+    <ds:schemaRef ds:uri="http://schemas.microsoft.com/sharepoint/v3"/>
+    <ds:schemaRef ds:uri="http://purl.org/dc/elements/1.1/"/>
+    <ds:schemaRef ds:uri="http://schemas.microsoft.com/office/2006/documentManagement/types"/>
+    <ds:schemaRef ds:uri="12239fb0-26c0-4a37-b790-6c81fba9d0fc"/>
+    <ds:schemaRef ds:uri="16dc66bd-df5a-4495-a5c9-5e296f49988a"/>
+    <ds:schemaRef ds:uri="http://www.w3.org/XML/1998/namespace"/>
+    <ds:schemaRef ds:uri="http://purl.org/dc/terms/"/>
+  </ds:schemaRefs>
+</ds:datastoreItem>
+</file>
+
+<file path=customXml/itemProps2.xml><?xml version="1.0" encoding="utf-8"?>
 <ds:datastoreItem xmlns:ds="http://schemas.openxmlformats.org/officeDocument/2006/customXml" ds:itemID="{F517AA3B-FC88-46DF-B5BA-DC6634CFCC94}">
   <ds:schemaRefs>
     <ds:schemaRef ds:uri="12239fb0-26c0-4a37-b790-6c81fba9d0fc"/>
@@ -11444,24 +11465,6 @@
 </ds:datastoreItem>
 </file>
 
-<file path=customXml/itemProps2.xml><?xml version="1.0" encoding="utf-8"?>
-<ds:datastoreItem xmlns:ds="http://schemas.openxmlformats.org/officeDocument/2006/customXml" ds:itemID="{B59C5458-A72E-4627-9FFC-D350DCB4700F}">
-  <ds:schemaRefs>
-    <ds:schemaRef ds:uri="http://schemas.microsoft.com/office/2006/metadata/properties"/>
-    <ds:schemaRef ds:uri="http://schemas.openxmlformats.org/package/2006/metadata/core-properties"/>
-    <ds:schemaRef ds:uri="http://purl.org/dc/dcmitype/"/>
-    <ds:schemaRef ds:uri="http://schemas.microsoft.com/office/infopath/2007/PartnerControls"/>
-    <ds:schemaRef ds:uri="http://schemas.microsoft.com/sharepoint/v3"/>
-    <ds:schemaRef ds:uri="http://purl.org/dc/elements/1.1/"/>
-    <ds:schemaRef ds:uri="http://schemas.microsoft.com/office/2006/documentManagement/types"/>
-    <ds:schemaRef ds:uri="12239fb0-26c0-4a37-b790-6c81fba9d0fc"/>
-    <ds:schemaRef ds:uri="16dc66bd-df5a-4495-a5c9-5e296f49988a"/>
-    <ds:schemaRef ds:uri="http://www.w3.org/XML/1998/namespace"/>
-    <ds:schemaRef ds:uri="http://purl.org/dc/terms/"/>
-  </ds:schemaRefs>
-</ds:datastoreItem>
-</file>
-
 <file path=customXml/itemProps3.xml><?xml version="1.0" encoding="utf-8"?>
 <ds:datastoreItem xmlns:ds="http://schemas.openxmlformats.org/officeDocument/2006/customXml" ds:itemID="{758FDAC0-319D-4A54-8D8E-1D42CB1F8004}">
   <ds:schemaRefs>
